--- a/DIA 2 - APRESENTACAO - VERSAO AMPLIADA FINAL V2.pptx
+++ b/DIA 2 - APRESENTACAO - VERSAO AMPLIADA FINAL V2.pptx
@@ -3630,7 +3630,7 @@
           <a:p>
             <a:fld id="{9B3F8303-3E6A-4B9A-B114-90BC24763552}" type="datetimeFigureOut">
               <a:rPr lang="pt-BR" smtClean="0"/>
-              <a:t>15/10/2026</a:t>
+              <a:t>20/10/2026</a:t>
             </a:fld>
             <a:endParaRPr lang="pt-BR"/>
           </a:p>
@@ -5304,7 +5304,7 @@
           <a:p>
             <a:fld id="{6D1CE400-4242-4B09-9036-D13CC6199FDE}" type="datetimeFigureOut">
               <a:rPr lang="pt-BR" smtClean="0"/>
-              <a:t>15/10/2026</a:t>
+              <a:t>20/10/2026</a:t>
             </a:fld>
             <a:endParaRPr lang="pt-BR"/>
           </a:p>
@@ -5502,7 +5502,7 @@
           <a:p>
             <a:fld id="{6D1CE400-4242-4B09-9036-D13CC6199FDE}" type="datetimeFigureOut">
               <a:rPr lang="pt-BR" smtClean="0"/>
-              <a:t>15/10/2026</a:t>
+              <a:t>20/10/2026</a:t>
             </a:fld>
             <a:endParaRPr lang="pt-BR"/>
           </a:p>
@@ -5710,7 +5710,7 @@
           <a:p>
             <a:fld id="{6D1CE400-4242-4B09-9036-D13CC6199FDE}" type="datetimeFigureOut">
               <a:rPr lang="pt-BR" smtClean="0"/>
-              <a:t>15/10/2026</a:t>
+              <a:t>20/10/2026</a:t>
             </a:fld>
             <a:endParaRPr lang="pt-BR"/>
           </a:p>
@@ -5908,7 +5908,7 @@
           <a:p>
             <a:fld id="{6D1CE400-4242-4B09-9036-D13CC6199FDE}" type="datetimeFigureOut">
               <a:rPr lang="pt-BR" smtClean="0"/>
-              <a:t>15/10/2026</a:t>
+              <a:t>20/10/2026</a:t>
             </a:fld>
             <a:endParaRPr lang="pt-BR"/>
           </a:p>
@@ -6183,7 +6183,7 @@
           <a:p>
             <a:fld id="{6D1CE400-4242-4B09-9036-D13CC6199FDE}" type="datetimeFigureOut">
               <a:rPr lang="pt-BR" smtClean="0"/>
-              <a:t>15/10/2026</a:t>
+              <a:t>20/10/2026</a:t>
             </a:fld>
             <a:endParaRPr lang="pt-BR"/>
           </a:p>
@@ -6448,7 +6448,7 @@
           <a:p>
             <a:fld id="{6D1CE400-4242-4B09-9036-D13CC6199FDE}" type="datetimeFigureOut">
               <a:rPr lang="pt-BR" smtClean="0"/>
-              <a:t>15/10/2026</a:t>
+              <a:t>20/10/2026</a:t>
             </a:fld>
             <a:endParaRPr lang="pt-BR"/>
           </a:p>
@@ -6860,7 +6860,7 @@
           <a:p>
             <a:fld id="{6D1CE400-4242-4B09-9036-D13CC6199FDE}" type="datetimeFigureOut">
               <a:rPr lang="pt-BR" smtClean="0"/>
-              <a:t>15/10/2026</a:t>
+              <a:t>20/10/2026</a:t>
             </a:fld>
             <a:endParaRPr lang="pt-BR"/>
           </a:p>
@@ -7001,7 +7001,7 @@
           <a:p>
             <a:fld id="{6D1CE400-4242-4B09-9036-D13CC6199FDE}" type="datetimeFigureOut">
               <a:rPr lang="pt-BR" smtClean="0"/>
-              <a:t>15/10/2026</a:t>
+              <a:t>20/10/2026</a:t>
             </a:fld>
             <a:endParaRPr lang="pt-BR"/>
           </a:p>
@@ -7114,7 +7114,7 @@
           <a:p>
             <a:fld id="{6D1CE400-4242-4B09-9036-D13CC6199FDE}" type="datetimeFigureOut">
               <a:rPr lang="pt-BR" smtClean="0"/>
-              <a:t>15/10/2026</a:t>
+              <a:t>20/10/2026</a:t>
             </a:fld>
             <a:endParaRPr lang="pt-BR"/>
           </a:p>
@@ -7425,7 +7425,7 @@
           <a:p>
             <a:fld id="{6D1CE400-4242-4B09-9036-D13CC6199FDE}" type="datetimeFigureOut">
               <a:rPr lang="pt-BR" smtClean="0"/>
-              <a:t>15/10/2026</a:t>
+              <a:t>20/10/2026</a:t>
             </a:fld>
             <a:endParaRPr lang="pt-BR"/>
           </a:p>
@@ -7713,7 +7713,7 @@
           <a:p>
             <a:fld id="{6D1CE400-4242-4B09-9036-D13CC6199FDE}" type="datetimeFigureOut">
               <a:rPr lang="pt-BR" smtClean="0"/>
-              <a:t>15/10/2026</a:t>
+              <a:t>20/10/2026</a:t>
             </a:fld>
             <a:endParaRPr lang="pt-BR"/>
           </a:p>
@@ -7957,7 +7957,7 @@
           <a:p>
             <a:fld id="{6D1CE400-4242-4B09-9036-D13CC6199FDE}" type="datetimeFigureOut">
               <a:rPr lang="pt-BR" smtClean="0"/>
-              <a:t>15/10/2026</a:t>
+              <a:t>20/10/2026</a:t>
             </a:fld>
             <a:endParaRPr lang="pt-BR"/>
           </a:p>
